--- a/site/clases/parte-2-deep-learning/108-inicializacion-glorot-he/clase-108-inicializacion-glorot-he-presentacion.pptx
+++ b/site/clases/parte-2-deep-learning/108-inicializacion-glorot-he/clase-108-inicializacion-glorot-he-presentacion.pptx
@@ -3272,7 +3272,7 @@
                 </a:solidFill>
                 <a:latin typeface="Segoe UI"/>
               </a:rPr>
-              <a:t>Parte: 2 — Deep Learning · Fuente: Géron, cap. 11 § Glorot and He Initialization.  Duración estimada: 55 min.</a:t>
+              <a:t>Parte: 2 — Deep Learning · Fuente: Géron, cap. 11 § Glorot and He Initialization.  Duración estimada: 55 min. · Nivel: Avanzado</a:t>
             </a:r>
           </a:p>
         </p:txBody>
@@ -3581,7 +3581,7 @@
                 </a:solidFill>
                 <a:latin typeface="Segoe UI"/>
               </a:rPr>
-              <a:t>Parte: 2 — Deep Learning · Fuente: Géron, cap. 11 § Glorot and He Initialization.  Duración estimada: 55 min.</a:t>
+              <a:t>Parte: 2 — Deep Learning · Fuente: Géron, cap. 11 § Glorot and He Initialization.  Duración estimada: 55 min. · Nivel: Avanzado</a:t>
             </a:r>
           </a:p>
         </p:txBody>
@@ -4801,7 +4801,7 @@
                 </a:solidFill>
                 <a:latin typeface="Segoe UI"/>
               </a:rPr>
-              <a:t>Primer bloque ejecutable del notebook.</a:t>
+              <a:t>Dense usa glorot_uniform por defecto: U(-√(6/(fan_in+fan_out)), +√(6/(fan_in+fan_out))).</a:t>
             </a:r>
           </a:p>
         </p:txBody>
@@ -4888,7 +4888,254 @@
                 </a:solidFill>
                 <a:latin typeface="Courier New"/>
               </a:rPr>
-              <a:t># Imports y configuración inicial</a:t>
+              <a:t>import numpy as np</a:t>
+            </a:r>
+          </a:p>
+          <a:p>
+            <a:pPr>
+              <a:defRPr sz="1200" b="0">
+                <a:solidFill>
+                  <a:srgbClr val="F8FAFC"/>
+                </a:solidFill>
+                <a:latin typeface="Courier New"/>
+              </a:defRPr>
+            </a:pPr>
+            <a:r>
+              <a:rPr sz="1200" b="0">
+                <a:solidFill>
+                  <a:srgbClr val="F8FAFC"/>
+                </a:solidFill>
+                <a:latin typeface="Courier New"/>
+              </a:rPr>
+              <a:t>from tensorflow import keras</a:t>
+            </a:r>
+          </a:p>
+          <a:p>
+            <a:pPr>
+              <a:defRPr sz="1200" b="0">
+                <a:solidFill>
+                  <a:srgbClr val="F8FAFC"/>
+                </a:solidFill>
+                <a:latin typeface="Courier New"/>
+              </a:defRPr>
+            </a:pPr>
+            <a:r>
+              <a:rPr sz="1200" b="0">
+                <a:solidFill>
+                  <a:srgbClr val="F8FAFC"/>
+                </a:solidFill>
+                <a:latin typeface="Courier New"/>
+              </a:rPr>
+              <a:t>from tensorflow.keras import layers</a:t>
+            </a:r>
+          </a:p>
+          <a:p>
+            <a:pPr>
+              <a:defRPr sz="1200" b="0">
+                <a:solidFill>
+                  <a:srgbClr val="F8FAFC"/>
+                </a:solidFill>
+                <a:latin typeface="Courier New"/>
+              </a:defRPr>
+            </a:pPr>
+            <a:r>
+              <a:rPr sz="1200" b="0">
+                <a:solidFill>
+                  <a:srgbClr val="F8FAFC"/>
+                </a:solidFill>
+                <a:latin typeface="Courier New"/>
+              </a:rPr>
+              <a:t>keras.utils.set_random_seed(42)</a:t>
+            </a:r>
+          </a:p>
+          <a:p>
+            <a:pPr>
+              <a:defRPr sz="1200" b="0">
+                <a:solidFill>
+                  <a:srgbClr val="F8FAFC"/>
+                </a:solidFill>
+                <a:latin typeface="Courier New"/>
+              </a:defRPr>
+            </a:pPr>
+            <a:r>
+              <a:rPr sz="1200" b="0">
+                <a:solidFill>
+                  <a:srgbClr val="F8FAFC"/>
+                </a:solidFill>
+                <a:latin typeface="Courier New"/>
+              </a:rPr>
+              <a:t> </a:t>
+            </a:r>
+          </a:p>
+          <a:p>
+            <a:pPr>
+              <a:defRPr sz="1200" b="0">
+                <a:solidFill>
+                  <a:srgbClr val="F8FAFC"/>
+                </a:solidFill>
+                <a:latin typeface="Courier New"/>
+              </a:defRPr>
+            </a:pPr>
+            <a:r>
+              <a:rPr sz="1200" b="0">
+                <a:solidFill>
+                  <a:srgbClr val="F8FAFC"/>
+                </a:solidFill>
+                <a:latin typeface="Courier New"/>
+              </a:rPr>
+              <a:t>capa = layers.Dense(256, kernel_initializer="glorot_uniform")</a:t>
+            </a:r>
+          </a:p>
+          <a:p>
+            <a:pPr>
+              <a:defRPr sz="1200" b="0">
+                <a:solidFill>
+                  <a:srgbClr val="F8FAFC"/>
+                </a:solidFill>
+                <a:latin typeface="Courier New"/>
+              </a:defRPr>
+            </a:pPr>
+            <a:r>
+              <a:rPr sz="1200" b="0">
+                <a:solidFill>
+                  <a:srgbClr val="F8FAFC"/>
+                </a:solidFill>
+                <a:latin typeface="Courier New"/>
+              </a:rPr>
+              <a:t>capa.build((None, 784))                          # materializa los pesos</a:t>
+            </a:r>
+          </a:p>
+          <a:p>
+            <a:pPr>
+              <a:defRPr sz="1200" b="0">
+                <a:solidFill>
+                  <a:srgbClr val="F8FAFC"/>
+                </a:solidFill>
+                <a:latin typeface="Courier New"/>
+              </a:defRPr>
+            </a:pPr>
+            <a:r>
+              <a:rPr sz="1200" b="0">
+                <a:solidFill>
+                  <a:srgbClr val="F8FAFC"/>
+                </a:solidFill>
+                <a:latin typeface="Courier New"/>
+              </a:rPr>
+              <a:t>W = capa.kernel.numpy()</a:t>
+            </a:r>
+          </a:p>
+          <a:p>
+            <a:pPr>
+              <a:defRPr sz="1200" b="0">
+                <a:solidFill>
+                  <a:srgbClr val="F8FAFC"/>
+                </a:solidFill>
+                <a:latin typeface="Courier New"/>
+              </a:defRPr>
+            </a:pPr>
+            <a:r>
+              <a:rPr sz="1200" b="0">
+                <a:solidFill>
+                  <a:srgbClr val="F8FAFC"/>
+                </a:solidFill>
+                <a:latin typeface="Courier New"/>
+              </a:rPr>
+              <a:t>fan_in, fan_out = 784, 256</a:t>
+            </a:r>
+          </a:p>
+          <a:p>
+            <a:pPr>
+              <a:defRPr sz="1200" b="0">
+                <a:solidFill>
+                  <a:srgbClr val="F8FAFC"/>
+                </a:solidFill>
+                <a:latin typeface="Courier New"/>
+              </a:defRPr>
+            </a:pPr>
+            <a:r>
+              <a:rPr sz="1200" b="0">
+                <a:solidFill>
+                  <a:srgbClr val="F8FAFC"/>
+                </a:solidFill>
+                <a:latin typeface="Courier New"/>
+              </a:rPr>
+              <a:t>limite = np.sqrt(6 / (fan_in + fan_out))</a:t>
+            </a:r>
+          </a:p>
+          <a:p>
+            <a:pPr>
+              <a:defRPr sz="1200" b="0">
+                <a:solidFill>
+                  <a:srgbClr val="F8FAFC"/>
+                </a:solidFill>
+                <a:latin typeface="Courier New"/>
+              </a:defRPr>
+            </a:pPr>
+            <a:r>
+              <a:rPr sz="1200" b="0">
+                <a:solidFill>
+                  <a:srgbClr val="F8FAFC"/>
+                </a:solidFill>
+                <a:latin typeface="Courier New"/>
+              </a:rPr>
+              <a:t>print("límite teórico Glorot uniform: ±", round(limite, 4))</a:t>
+            </a:r>
+          </a:p>
+          <a:p>
+            <a:pPr>
+              <a:defRPr sz="1200" b="0">
+                <a:solidFill>
+                  <a:srgbClr val="F8FAFC"/>
+                </a:solidFill>
+                <a:latin typeface="Courier New"/>
+              </a:defRPr>
+            </a:pPr>
+            <a:r>
+              <a:rPr sz="1200" b="0">
+                <a:solidFill>
+                  <a:srgbClr val="F8FAFC"/>
+                </a:solidFill>
+                <a:latin typeface="Courier New"/>
+              </a:rPr>
+              <a:t>print("min/max empírico:", round(W.min(), 4), round(W.max(), 4))</a:t>
+            </a:r>
+          </a:p>
+          <a:p>
+            <a:pPr>
+              <a:defRPr sz="1200" b="0">
+                <a:solidFill>
+                  <a:srgbClr val="F8FAFC"/>
+                </a:solidFill>
+                <a:latin typeface="Courier New"/>
+              </a:defRPr>
+            </a:pPr>
+            <a:r>
+              <a:rPr sz="1200" b="0">
+                <a:solidFill>
+                  <a:srgbClr val="F8FAFC"/>
+                </a:solidFill>
+                <a:latin typeface="Courier New"/>
+              </a:rPr>
+              <a:t>print("var empírica:", round(W.var(), 6),</a:t>
+            </a:r>
+          </a:p>
+          <a:p>
+            <a:pPr>
+              <a:defRPr sz="1200" b="0">
+                <a:solidFill>
+                  <a:srgbClr val="F8FAFC"/>
+                </a:solidFill>
+                <a:latin typeface="Courier New"/>
+              </a:defRPr>
+            </a:pPr>
+            <a:r>
+              <a:rPr sz="1200" b="0">
+                <a:solidFill>
+                  <a:srgbClr val="F8FAFC"/>
+                </a:solidFill>
+                <a:latin typeface="Courier New"/>
+              </a:rPr>
+              <a:t>      "| var teórica 2/(fan_in+fan_out):", round(2 / (fan_in + fan_out), 6))</a:t>
             </a:r>
           </a:p>
         </p:txBody>
